--- a/static/llm_table/llm_table2.pptx
+++ b/static/llm_table/llm_table2.pptx
@@ -3696,7 +3696,7 @@
           <p:nvPr>
             <p:extLst>
               <p:ext uri="{D42A27DB-BD31-4B8C-83A1-F6EECF244321}">
-                <p14:modId xmlns:p14="http://schemas.microsoft.com/office/powerpoint/2010/main" val="1021914615"/>
+                <p14:modId xmlns:p14="http://schemas.microsoft.com/office/powerpoint/2010/main" val="2303895186"/>
               </p:ext>
             </p:extLst>
           </p:nvPr>
@@ -4364,9 +4364,10 @@
                         <a:defRPr/>
                       </a:pPr>
                       <a:r>
-                        <a:rPr lang="en-US" altLang="zh-TW" sz="2800" dirty="0"/>
-                        <a:t>MMLI</a:t>
-                      </a:r>
+                        <a:rPr lang="en-US" altLang="zh-TW" sz="2800"/>
+                        <a:t>MMLU</a:t>
+                      </a:r>
+                      <a:endParaRPr lang="en-US" altLang="zh-TW" sz="2800" dirty="0"/>
                     </a:p>
                     <a:p>
                       <a:pPr marL="0" marR="0" lvl="0" indent="0" algn="ctr" defTabSz="914400" rtl="0" eaLnBrk="1" fontAlgn="auto" latinLnBrk="0" hangingPunct="1">

--- a/static/llm_table/llm_table2.pptx
+++ b/static/llm_table/llm_table2.pptx
@@ -16233,10 +16233,10 @@
       </p:grpSpPr>
       <p:pic>
         <p:nvPicPr>
-          <p:cNvPr id="2" name="圖片 1">
+          <p:cNvPr id="3" name="圖片 2">
             <a:extLst>
               <a:ext uri="{FF2B5EF4-FFF2-40B4-BE49-F238E27FC236}">
-                <a16:creationId xmlns:a16="http://schemas.microsoft.com/office/drawing/2014/main" id="{8865C064-A404-41B8-3E86-1FEC84443251}"/>
+                <a16:creationId xmlns:a16="http://schemas.microsoft.com/office/drawing/2014/main" id="{8CEA8F96-FA0C-5C7E-208B-1907C4EFCBCA}"/>
               </a:ext>
             </a:extLst>
           </p:cNvPr>
@@ -16253,8 +16253,8 @@
         </p:blipFill>
         <p:spPr>
           <a:xfrm>
-            <a:off x="0" y="305168"/>
-            <a:ext cx="12227091" cy="5665326"/>
+            <a:off x="0" y="476215"/>
+            <a:ext cx="12192000" cy="5649067"/>
           </a:xfrm>
           <a:prstGeom prst="rect">
             <a:avLst/>
